--- a/paper/cbsafe_method_slides.pptx
+++ b/paper/cbsafe_method_slides.pptx
@@ -4545,7 +4545,7 @@
         <p:spPr>
           <a:xfrm>
             <a:off x="7360920" y="1645920"/>
-            <a:ext cx="4206240" cy="2492084"/>
+            <a:ext cx="4206240" cy="3444379"/>
           </a:xfrm>
           <a:prstGeom prst="rect">
             <a:avLst/>
